--- a/3-Master_Plan/re_entry/HEROs_and_PASSes/tenure_sandbox/hero/TENURE_HERO_slides_AUTO.pptx
+++ b/3-Master_Plan/re_entry/HEROs_and_PASSes/tenure_sandbox/hero/TENURE_HERO_slides_AUTO.pptx
@@ -13,6 +13,13 @@
     <p:sldId id="261" r:id="rId12"/>
     <p:sldId id="262" r:id="rId13"/>
     <p:sldId id="263" r:id="rId14"/>
+    <p:sldId id="264" r:id="rId15"/>
+    <p:sldId id="265" r:id="rId16"/>
+    <p:sldId id="266" r:id="rId17"/>
+    <p:sldId id="267" r:id="rId18"/>
+    <p:sldId id="268" r:id="rId19"/>
+    <p:sldId id="269" r:id="rId20"/>
+    <p:sldId id="270" r:id="rId21"/>
   </p:sldIdLst>
   <p:sldSz cx="12191695" cy="6858000" type="screen4x3"/>
   <p:notesSz cx="6858000" cy="9144000"/>
@@ -3129,7 +3136,7 @@
               <a:defRPr sz="1200" i="1"/>
             </a:pPr>
             <a:r>
-              <a:t>2026-09-01 · infHM · MBB slide format</a:t>
+              <a:t>2026-09-02 · infHM · MBB slide format</a:t>
             </a:r>
           </a:p>
         </p:txBody>
@@ -3174,7 +3181,7 @@
               <a:defRPr sz="1200"/>
             </a:pPr>
             <a:r>
-              <a:t>• Spell-mean annual LOO = v0; last-ps cum LOO = MBB cross-section at exit.</a:t>
+              <a:t>• ASST-PS · mean · peer LOO (annum) = v0 default · N≈796.</a:t>
             </a:r>
           </a:p>
           <a:p>
@@ -3185,7 +3192,7 @@
               <a:defRPr sz="1200"/>
             </a:pPr>
             <a:r>
-              <a:t>• Last-ps own cum pubs = ability slice (toward F-HERO).</a:t>
+              <a:t>• LAST-PS · cum · peer LOO = final assistant year (MBB exit cross-section) · N≈732–805.</a:t>
             </a:r>
           </a:p>
           <a:p>
@@ -3196,7 +3203,7 @@
               <a:defRPr sz="1200"/>
             </a:pPr>
             <a:r>
-              <a:t>• Rates among resolved only (Option A); MBB bar panel + shape readout.</a:t>
+              <a:t>• Rates among resolved only (Option A); yellow badge = window on each plot.</a:t>
             </a:r>
           </a:p>
         </p:txBody>
@@ -3234,6 +3241,876 @@
             <a:br/>
             <a:r>
               <a:t>python tenure/scripts/build_tenure_hero_slides.py</a:t>
+            </a:r>
+          </a:p>
+        </p:txBody>
+      </p:sp>
+    </p:spTree>
+  </p:cSld>
+  <p:clrMapOvr>
+    <a:masterClrMapping/>
+  </p:clrMapOvr>
+</p:sld>
+</file>
+
+<file path=ppt/slides/slide10.xml><?xml version="1.0" encoding="utf-8"?>
+<p:sld xmlns:a="http://schemas.openxmlformats.org/drawingml/2006/main" xmlns:p="http://schemas.openxmlformats.org/presentationml/2006/main" xmlns:r="http://schemas.openxmlformats.org/officeDocument/2006/relationships">
+  <p:cSld>
+    <p:spTree>
+      <p:nvGrpSpPr>
+        <p:cNvPr id="1" name=""/>
+        <p:cNvGrpSpPr/>
+        <p:nvPr/>
+      </p:nvGrpSpPr>
+      <p:grpSpPr/>
+      <p:sp>
+        <p:nvSpPr>
+          <p:cNvPr id="2" name="TextBox 1"/>
+          <p:cNvSpPr txBox="1"/>
+          <p:nvPr/>
+        </p:nvSpPr>
+        <p:spPr>
+          <a:xfrm>
+            <a:off x="411480" y="201168"/>
+            <a:ext cx="11368735" cy="502920"/>
+          </a:xfrm>
+          <a:prstGeom prst="rect">
+            <a:avLst/>
+          </a:prstGeom>
+          <a:noFill/>
+        </p:spPr>
+        <p:txBody>
+          <a:bodyPr wrap="square">
+            <a:spAutoFit/>
+          </a:bodyPr>
+          <a:lstStyle/>
+          <a:p>
+            <a:pPr>
+              <a:defRPr b="1" sz="2000"/>
+            </a:pPr>
+            <a:r>
+              <a:t>Slide 8 — Decision HERO — Q16 dept pond LOO</a:t>
+            </a:r>
+          </a:p>
+          <a:p>
+            <a:pPr>
+              <a:defRPr sz="1200" i="1"/>
+            </a:pPr>
+            <a:r>
+              <a:t>DECISION · dept LOO career rate · N=389 · res=389</a:t>
+            </a:r>
+          </a:p>
+        </p:txBody>
+      </p:sp>
+      <p:pic>
+        <p:nvPicPr>
+          <p:cNvPr id="3" name="Picture 2" descr="HERO_tenure_q16_decision_dept_loo_infHM_slide.png"/>
+          <p:cNvPicPr>
+            <a:picLocks noChangeAspect="1"/>
+          </p:cNvPicPr>
+          <p:nvPr/>
+        </p:nvPicPr>
+        <p:blipFill>
+          <a:blip r:embed="rId2"/>
+          <a:stretch>
+            <a:fillRect/>
+          </a:stretch>
+        </p:blipFill>
+        <p:spPr>
+          <a:xfrm>
+            <a:off x="3022104" y="777240"/>
+            <a:ext cx="6147486" cy="4114799"/>
+          </a:xfrm>
+          <a:prstGeom prst="rect">
+            <a:avLst/>
+          </a:prstGeom>
+        </p:spPr>
+      </p:pic>
+      <p:sp>
+        <p:nvSpPr>
+          <p:cNvPr id="4" name="TextBox 3"/>
+          <p:cNvSpPr txBox="1"/>
+          <p:nvPr/>
+        </p:nvSpPr>
+        <p:spPr>
+          <a:xfrm>
+            <a:off x="411480" y="4983479"/>
+            <a:ext cx="11368735" cy="1051560"/>
+          </a:xfrm>
+          <a:prstGeom prst="rect">
+            <a:avLst/>
+          </a:prstGeom>
+          <a:noFill/>
+        </p:spPr>
+        <p:txBody>
+          <a:bodyPr wrap="square" anchor="t">
+            <a:spAutoFit/>
+          </a:bodyPr>
+          <a:lstStyle/>
+          <a:p>
+            <a:pPr algn="l">
+              <a:defRPr sz="800">
+                <a:latin typeface="Menlo"/>
+              </a:defRPr>
+            </a:pPr>
+            <a:r>
+              <a:t>python tenure/scripts/tenure_pass_a_decision_hero.py</a:t>
+            </a:r>
+          </a:p>
+        </p:txBody>
+      </p:sp>
+      <p:sp>
+        <p:nvSpPr>
+          <p:cNvPr id="5" name="TextBox 4"/>
+          <p:cNvSpPr txBox="1"/>
+          <p:nvPr/>
+        </p:nvSpPr>
+        <p:spPr>
+          <a:xfrm>
+            <a:off x="411480" y="6080759"/>
+            <a:ext cx="11368735" cy="320040"/>
+          </a:xfrm>
+          <a:prstGeom prst="rect">
+            <a:avLst/>
+          </a:prstGeom>
+          <a:noFill/>
+        </p:spPr>
+        <p:txBody>
+          <a:bodyPr wrap="none">
+            <a:spAutoFit/>
+          </a:bodyPr>
+          <a:lstStyle/>
+          <a:p>
+            <a:pPr>
+              <a:defRPr sz="1100"/>
+            </a:pPr>
+            <a:r>
+              <a:t>Shape: bin1=48.0% · peak=ventile 6 @ 79.167% · last=37.5% · LPM β₂=-0.01734</a:t>
+            </a:r>
+          </a:p>
+        </p:txBody>
+      </p:sp>
+    </p:spTree>
+  </p:cSld>
+  <p:clrMapOvr>
+    <a:masterClrMapping/>
+  </p:clrMapOvr>
+</p:sld>
+</file>
+
+<file path=ppt/slides/slide11.xml><?xml version="1.0" encoding="utf-8"?>
+<p:sld xmlns:a="http://schemas.openxmlformats.org/drawingml/2006/main" xmlns:p="http://schemas.openxmlformats.org/presentationml/2006/main" xmlns:r="http://schemas.openxmlformats.org/officeDocument/2006/relationships">
+  <p:cSld>
+    <p:spTree>
+      <p:nvGrpSpPr>
+        <p:cNvPr id="1" name=""/>
+        <p:cNvGrpSpPr/>
+        <p:nvPr/>
+      </p:nvGrpSpPr>
+      <p:grpSpPr/>
+      <p:sp>
+        <p:nvSpPr>
+          <p:cNvPr id="2" name="TextBox 1"/>
+          <p:cNvSpPr txBox="1"/>
+          <p:nvPr/>
+        </p:nvSpPr>
+        <p:spPr>
+          <a:xfrm>
+            <a:off x="411480" y="201168"/>
+            <a:ext cx="11368735" cy="502920"/>
+          </a:xfrm>
+          <a:prstGeom prst="rect">
+            <a:avLst/>
+          </a:prstGeom>
+          <a:noFill/>
+        </p:spPr>
+        <p:txBody>
+          <a:bodyPr wrap="square">
+            <a:spAutoFit/>
+          </a:bodyPr>
+          <a:lstStyle/>
+          <a:p>
+            <a:pPr>
+              <a:defRPr b="1" sz="2000"/>
+            </a:pPr>
+            <a:r>
+              <a:t>Slide 9 — Decision HERO — Q8 dept pond LOO</a:t>
+            </a:r>
+          </a:p>
+          <a:p>
+            <a:pPr>
+              <a:defRPr sz="1200" i="1"/>
+            </a:pPr>
+            <a:r>
+              <a:t>DECISION · dept LOO career rate · N=389 · res=389</a:t>
+            </a:r>
+          </a:p>
+        </p:txBody>
+      </p:sp>
+      <p:pic>
+        <p:nvPicPr>
+          <p:cNvPr id="3" name="Picture 2" descr="HERO_tenure_q8_decision_dept_loo_infHM_slide.png"/>
+          <p:cNvPicPr>
+            <a:picLocks noChangeAspect="1"/>
+          </p:cNvPicPr>
+          <p:nvPr/>
+        </p:nvPicPr>
+        <p:blipFill>
+          <a:blip r:embed="rId2"/>
+          <a:stretch>
+            <a:fillRect/>
+          </a:stretch>
+        </p:blipFill>
+        <p:spPr>
+          <a:xfrm>
+            <a:off x="3022104" y="777240"/>
+            <a:ext cx="6147486" cy="4114799"/>
+          </a:xfrm>
+          <a:prstGeom prst="rect">
+            <a:avLst/>
+          </a:prstGeom>
+        </p:spPr>
+      </p:pic>
+      <p:sp>
+        <p:nvSpPr>
+          <p:cNvPr id="4" name="TextBox 3"/>
+          <p:cNvSpPr txBox="1"/>
+          <p:nvPr/>
+        </p:nvSpPr>
+        <p:spPr>
+          <a:xfrm>
+            <a:off x="411480" y="4983479"/>
+            <a:ext cx="11368735" cy="1051560"/>
+          </a:xfrm>
+          <a:prstGeom prst="rect">
+            <a:avLst/>
+          </a:prstGeom>
+          <a:noFill/>
+        </p:spPr>
+        <p:txBody>
+          <a:bodyPr wrap="square" anchor="t">
+            <a:spAutoFit/>
+          </a:bodyPr>
+          <a:lstStyle/>
+          <a:p>
+            <a:pPr algn="l">
+              <a:defRPr sz="800">
+                <a:latin typeface="Menlo"/>
+              </a:defRPr>
+            </a:pPr>
+            <a:r>
+              <a:t>python tenure/scripts/tenure_pass_a_decision_hero.py --n-bins 8 --output-tag q8_decision_dept_loo_infHM</a:t>
+            </a:r>
+          </a:p>
+        </p:txBody>
+      </p:sp>
+      <p:sp>
+        <p:nvSpPr>
+          <p:cNvPr id="5" name="TextBox 4"/>
+          <p:cNvSpPr txBox="1"/>
+          <p:nvPr/>
+        </p:nvSpPr>
+        <p:spPr>
+          <a:xfrm>
+            <a:off x="411480" y="6080759"/>
+            <a:ext cx="11368735" cy="320040"/>
+          </a:xfrm>
+          <a:prstGeom prst="rect">
+            <a:avLst/>
+          </a:prstGeom>
+          <a:noFill/>
+        </p:spPr>
+        <p:txBody>
+          <a:bodyPr wrap="none">
+            <a:spAutoFit/>
+          </a:bodyPr>
+          <a:lstStyle/>
+          <a:p>
+            <a:pPr>
+              <a:defRPr sz="1100"/>
+            </a:pPr>
+            <a:r>
+              <a:t>Shape: bin1=44.898% · peak=ventile 6 @ 77.083% · last=41.667% · LPM β₂=-0.01734</a:t>
+            </a:r>
+          </a:p>
+        </p:txBody>
+      </p:sp>
+    </p:spTree>
+  </p:cSld>
+  <p:clrMapOvr>
+    <a:masterClrMapping/>
+  </p:clrMapOvr>
+</p:sld>
+</file>
+
+<file path=ppt/slides/slide12.xml><?xml version="1.0" encoding="utf-8"?>
+<p:sld xmlns:a="http://schemas.openxmlformats.org/drawingml/2006/main" xmlns:p="http://schemas.openxmlformats.org/presentationml/2006/main" xmlns:r="http://schemas.openxmlformats.org/officeDocument/2006/relationships">
+  <p:cSld>
+    <p:spTree>
+      <p:nvGrpSpPr>
+        <p:cNvPr id="1" name=""/>
+        <p:cNvGrpSpPr/>
+        <p:nvPr/>
+      </p:nvGrpSpPr>
+      <p:grpSpPr/>
+      <p:sp>
+        <p:nvSpPr>
+          <p:cNvPr id="2" name="TextBox 1"/>
+          <p:cNvSpPr txBox="1"/>
+          <p:nvPr/>
+        </p:nvSpPr>
+        <p:spPr>
+          <a:xfrm>
+            <a:off x="411480" y="201168"/>
+            <a:ext cx="11368735" cy="502920"/>
+          </a:xfrm>
+          <a:prstGeom prst="rect">
+            <a:avLst/>
+          </a:prstGeom>
+          <a:noFill/>
+        </p:spPr>
+        <p:txBody>
+          <a:bodyPr wrap="square">
+            <a:spAutoFit/>
+          </a:bodyPr>
+          <a:lstStyle/>
+          <a:p>
+            <a:pPr>
+              <a:defRPr b="1" sz="2000"/>
+            </a:pPr>
+            <a:r>
+              <a:t>Slide 10 — Decision HERO — Q10 dept pond LOO</a:t>
+            </a:r>
+          </a:p>
+          <a:p>
+            <a:pPr>
+              <a:defRPr sz="1200" i="1"/>
+            </a:pPr>
+            <a:r>
+              <a:t>DECISION · dept LOO career rate · N=389 · res=389</a:t>
+            </a:r>
+          </a:p>
+        </p:txBody>
+      </p:sp>
+      <p:pic>
+        <p:nvPicPr>
+          <p:cNvPr id="3" name="Picture 2" descr="HERO_tenure_q10_decision_dept_loo_infHM_slide.png"/>
+          <p:cNvPicPr>
+            <a:picLocks noChangeAspect="1"/>
+          </p:cNvPicPr>
+          <p:nvPr/>
+        </p:nvPicPr>
+        <p:blipFill>
+          <a:blip r:embed="rId2"/>
+          <a:stretch>
+            <a:fillRect/>
+          </a:stretch>
+        </p:blipFill>
+        <p:spPr>
+          <a:xfrm>
+            <a:off x="3022104" y="777240"/>
+            <a:ext cx="6147486" cy="4114799"/>
+          </a:xfrm>
+          <a:prstGeom prst="rect">
+            <a:avLst/>
+          </a:prstGeom>
+        </p:spPr>
+      </p:pic>
+      <p:sp>
+        <p:nvSpPr>
+          <p:cNvPr id="4" name="TextBox 3"/>
+          <p:cNvSpPr txBox="1"/>
+          <p:nvPr/>
+        </p:nvSpPr>
+        <p:spPr>
+          <a:xfrm>
+            <a:off x="411480" y="4983479"/>
+            <a:ext cx="11368735" cy="1051560"/>
+          </a:xfrm>
+          <a:prstGeom prst="rect">
+            <a:avLst/>
+          </a:prstGeom>
+          <a:noFill/>
+        </p:spPr>
+        <p:txBody>
+          <a:bodyPr wrap="square" anchor="t">
+            <a:spAutoFit/>
+          </a:bodyPr>
+          <a:lstStyle/>
+          <a:p>
+            <a:pPr algn="l">
+              <a:defRPr sz="800">
+                <a:latin typeface="Menlo"/>
+              </a:defRPr>
+            </a:pPr>
+            <a:r>
+              <a:t>python tenure/scripts/tenure_pass_a_decision_hero.py --n-bins 10 --output-tag q10_decision_dept_loo_infHM</a:t>
+            </a:r>
+          </a:p>
+        </p:txBody>
+      </p:sp>
+      <p:sp>
+        <p:nvSpPr>
+          <p:cNvPr id="5" name="TextBox 4"/>
+          <p:cNvSpPr txBox="1"/>
+          <p:nvPr/>
+        </p:nvSpPr>
+        <p:spPr>
+          <a:xfrm>
+            <a:off x="411480" y="6080759"/>
+            <a:ext cx="11368735" cy="320040"/>
+          </a:xfrm>
+          <a:prstGeom prst="rect">
+            <a:avLst/>
+          </a:prstGeom>
+          <a:noFill/>
+        </p:spPr>
+        <p:txBody>
+          <a:bodyPr wrap="none">
+            <a:spAutoFit/>
+          </a:bodyPr>
+          <a:lstStyle/>
+          <a:p>
+            <a:pPr>
+              <a:defRPr sz="1100"/>
+            </a:pPr>
+            <a:r>
+              <a:t>Shape: bin1=41.026% · peak=ventile 4 @ 69.231% · last=36.842% · LPM β₂=-0.01734</a:t>
+            </a:r>
+          </a:p>
+        </p:txBody>
+      </p:sp>
+    </p:spTree>
+  </p:cSld>
+  <p:clrMapOvr>
+    <a:masterClrMapping/>
+  </p:clrMapOvr>
+</p:sld>
+</file>
+
+<file path=ppt/slides/slide13.xml><?xml version="1.0" encoding="utf-8"?>
+<p:sld xmlns:a="http://schemas.openxmlformats.org/drawingml/2006/main" xmlns:p="http://schemas.openxmlformats.org/presentationml/2006/main" xmlns:r="http://schemas.openxmlformats.org/officeDocument/2006/relationships">
+  <p:cSld>
+    <p:spTree>
+      <p:nvGrpSpPr>
+        <p:cNvPr id="1" name=""/>
+        <p:cNvGrpSpPr/>
+        <p:nvPr/>
+      </p:nvGrpSpPr>
+      <p:grpSpPr/>
+      <p:sp>
+        <p:nvSpPr>
+          <p:cNvPr id="2" name="TextBox 1"/>
+          <p:cNvSpPr txBox="1"/>
+          <p:nvPr/>
+        </p:nvSpPr>
+        <p:spPr>
+          <a:xfrm>
+            <a:off x="411480" y="201168"/>
+            <a:ext cx="11368735" cy="502920"/>
+          </a:xfrm>
+          <a:prstGeom prst="rect">
+            <a:avLst/>
+          </a:prstGeom>
+          <a:noFill/>
+        </p:spPr>
+        <p:txBody>
+          <a:bodyPr wrap="square">
+            <a:spAutoFit/>
+          </a:bodyPr>
+          <a:lstStyle/>
+          <a:p>
+            <a:pPr>
+              <a:defRPr b="1" sz="2000"/>
+            </a:pPr>
+            <a:r>
+              <a:t>Slide 11 — Decision HERO — Q16 own career rate</a:t>
+            </a:r>
+          </a:p>
+          <a:p>
+            <a:pPr>
+              <a:defRPr sz="1200" i="1"/>
+            </a:pPr>
+            <a:r>
+              <a:t>DECISION · own career pubs rate · N=280 · res=280</a:t>
+            </a:r>
+          </a:p>
+        </p:txBody>
+      </p:sp>
+      <p:pic>
+        <p:nvPicPr>
+          <p:cNvPr id="3" name="Picture 2" descr="HERO_tenure_q16_decision_own_career_infHM_slide.png"/>
+          <p:cNvPicPr>
+            <a:picLocks noChangeAspect="1"/>
+          </p:cNvPicPr>
+          <p:nvPr/>
+        </p:nvPicPr>
+        <p:blipFill>
+          <a:blip r:embed="rId2"/>
+          <a:stretch>
+            <a:fillRect/>
+          </a:stretch>
+        </p:blipFill>
+        <p:spPr>
+          <a:xfrm>
+            <a:off x="3022104" y="777240"/>
+            <a:ext cx="6147486" cy="4114799"/>
+          </a:xfrm>
+          <a:prstGeom prst="rect">
+            <a:avLst/>
+          </a:prstGeom>
+        </p:spPr>
+      </p:pic>
+      <p:sp>
+        <p:nvSpPr>
+          <p:cNvPr id="4" name="TextBox 3"/>
+          <p:cNvSpPr txBox="1"/>
+          <p:nvPr/>
+        </p:nvSpPr>
+        <p:spPr>
+          <a:xfrm>
+            <a:off x="411480" y="4983479"/>
+            <a:ext cx="11368735" cy="1051560"/>
+          </a:xfrm>
+          <a:prstGeom prst="rect">
+            <a:avLst/>
+          </a:prstGeom>
+          <a:noFill/>
+        </p:spPr>
+        <p:txBody>
+          <a:bodyPr wrap="square" anchor="t">
+            <a:spAutoFit/>
+          </a:bodyPr>
+          <a:lstStyle/>
+          <a:p>
+            <a:pPr algn="l">
+              <a:defRPr sz="800">
+                <a:latin typeface="Menlo"/>
+              </a:defRPr>
+            </a:pPr>
+            <a:r>
+              <a:t>python tenure/scripts/tenure_pass_a_decision_hero.py --x-metric own_career --output-tag q16_decision_own_career_infHM</a:t>
+            </a:r>
+          </a:p>
+        </p:txBody>
+      </p:sp>
+      <p:sp>
+        <p:nvSpPr>
+          <p:cNvPr id="5" name="TextBox 4"/>
+          <p:cNvSpPr txBox="1"/>
+          <p:nvPr/>
+        </p:nvSpPr>
+        <p:spPr>
+          <a:xfrm>
+            <a:off x="411480" y="6080759"/>
+            <a:ext cx="11368735" cy="320040"/>
+          </a:xfrm>
+          <a:prstGeom prst="rect">
+            <a:avLst/>
+          </a:prstGeom>
+          <a:noFill/>
+        </p:spPr>
+        <p:txBody>
+          <a:bodyPr wrap="none">
+            <a:spAutoFit/>
+          </a:bodyPr>
+          <a:lstStyle/>
+          <a:p>
+            <a:pPr>
+              <a:defRPr sz="1100"/>
+            </a:pPr>
+            <a:r>
+              <a:t>Shape: bin1=50.0% · peak=ventile 15 @ 77.778% · last=58.823% · LPM β₂=-0.0006929</a:t>
+            </a:r>
+          </a:p>
+        </p:txBody>
+      </p:sp>
+    </p:spTree>
+  </p:cSld>
+  <p:clrMapOvr>
+    <a:masterClrMapping/>
+  </p:clrMapOvr>
+</p:sld>
+</file>
+
+<file path=ppt/slides/slide14.xml><?xml version="1.0" encoding="utf-8"?>
+<p:sld xmlns:a="http://schemas.openxmlformats.org/drawingml/2006/main" xmlns:p="http://schemas.openxmlformats.org/presentationml/2006/main" xmlns:r="http://schemas.openxmlformats.org/officeDocument/2006/relationships">
+  <p:cSld>
+    <p:spTree>
+      <p:nvGrpSpPr>
+        <p:cNvPr id="1" name=""/>
+        <p:cNvGrpSpPr/>
+        <p:nvPr/>
+      </p:nvGrpSpPr>
+      <p:grpSpPr/>
+      <p:sp>
+        <p:nvSpPr>
+          <p:cNvPr id="2" name="TextBox 1"/>
+          <p:cNvSpPr txBox="1"/>
+          <p:nvPr/>
+        </p:nvSpPr>
+        <p:spPr>
+          <a:xfrm>
+            <a:off x="411480" y="201168"/>
+            <a:ext cx="11368735" cy="502920"/>
+          </a:xfrm>
+          <a:prstGeom prst="rect">
+            <a:avLst/>
+          </a:prstGeom>
+          <a:noFill/>
+        </p:spPr>
+        <p:txBody>
+          <a:bodyPr wrap="square">
+            <a:spAutoFit/>
+          </a:bodyPr>
+          <a:lstStyle/>
+          <a:p>
+            <a:pPr>
+              <a:defRPr b="1" sz="2000"/>
+            </a:pPr>
+            <a:r>
+              <a:t>Slide 12 — Decision HERO — Q8 own career rate</a:t>
+            </a:r>
+          </a:p>
+          <a:p>
+            <a:pPr>
+              <a:defRPr sz="1200" i="1"/>
+            </a:pPr>
+            <a:r>
+              <a:t>DECISION · own career pubs rate · N=280 · res=280</a:t>
+            </a:r>
+          </a:p>
+        </p:txBody>
+      </p:sp>
+      <p:pic>
+        <p:nvPicPr>
+          <p:cNvPr id="3" name="Picture 2" descr="HERO_tenure_q8_decision_own_career_infHM_slide.png"/>
+          <p:cNvPicPr>
+            <a:picLocks noChangeAspect="1"/>
+          </p:cNvPicPr>
+          <p:nvPr/>
+        </p:nvPicPr>
+        <p:blipFill>
+          <a:blip r:embed="rId2"/>
+          <a:stretch>
+            <a:fillRect/>
+          </a:stretch>
+        </p:blipFill>
+        <p:spPr>
+          <a:xfrm>
+            <a:off x="3022104" y="777240"/>
+            <a:ext cx="6147486" cy="4114799"/>
+          </a:xfrm>
+          <a:prstGeom prst="rect">
+            <a:avLst/>
+          </a:prstGeom>
+        </p:spPr>
+      </p:pic>
+      <p:sp>
+        <p:nvSpPr>
+          <p:cNvPr id="4" name="TextBox 3"/>
+          <p:cNvSpPr txBox="1"/>
+          <p:nvPr/>
+        </p:nvSpPr>
+        <p:spPr>
+          <a:xfrm>
+            <a:off x="411480" y="4983479"/>
+            <a:ext cx="11368735" cy="1051560"/>
+          </a:xfrm>
+          <a:prstGeom prst="rect">
+            <a:avLst/>
+          </a:prstGeom>
+          <a:noFill/>
+        </p:spPr>
+        <p:txBody>
+          <a:bodyPr wrap="square" anchor="t">
+            <a:spAutoFit/>
+          </a:bodyPr>
+          <a:lstStyle/>
+          <a:p>
+            <a:pPr algn="l">
+              <a:defRPr sz="800">
+                <a:latin typeface="Menlo"/>
+              </a:defRPr>
+            </a:pPr>
+            <a:r>
+              <a:t>python tenure/scripts/tenure_pass_a_decision_hero.py --x-metric own_career --n-bins 8 --output-tag q8_decision_own_career_infHM</a:t>
+            </a:r>
+          </a:p>
+        </p:txBody>
+      </p:sp>
+      <p:sp>
+        <p:nvSpPr>
+          <p:cNvPr id="5" name="TextBox 4"/>
+          <p:cNvSpPr txBox="1"/>
+          <p:nvPr/>
+        </p:nvSpPr>
+        <p:spPr>
+          <a:xfrm>
+            <a:off x="411480" y="6080759"/>
+            <a:ext cx="11368735" cy="320040"/>
+          </a:xfrm>
+          <a:prstGeom prst="rect">
+            <a:avLst/>
+          </a:prstGeom>
+          <a:noFill/>
+        </p:spPr>
+        <p:txBody>
+          <a:bodyPr wrap="none">
+            <a:spAutoFit/>
+          </a:bodyPr>
+          <a:lstStyle/>
+          <a:p>
+            <a:pPr>
+              <a:defRPr sz="1100"/>
+            </a:pPr>
+            <a:r>
+              <a:t>Shape: bin1=45.714% · peak=ventile 7 @ 71.429% · last=68.571% · LPM β₂=-0.0006929</a:t>
+            </a:r>
+          </a:p>
+        </p:txBody>
+      </p:sp>
+    </p:spTree>
+  </p:cSld>
+  <p:clrMapOvr>
+    <a:masterClrMapping/>
+  </p:clrMapOvr>
+</p:sld>
+</file>
+
+<file path=ppt/slides/slide15.xml><?xml version="1.0" encoding="utf-8"?>
+<p:sld xmlns:a="http://schemas.openxmlformats.org/drawingml/2006/main" xmlns:p="http://schemas.openxmlformats.org/presentationml/2006/main" xmlns:r="http://schemas.openxmlformats.org/officeDocument/2006/relationships">
+  <p:cSld>
+    <p:spTree>
+      <p:nvGrpSpPr>
+        <p:cNvPr id="1" name=""/>
+        <p:cNvGrpSpPr/>
+        <p:nvPr/>
+      </p:nvGrpSpPr>
+      <p:grpSpPr/>
+      <p:sp>
+        <p:nvSpPr>
+          <p:cNvPr id="2" name="TextBox 1"/>
+          <p:cNvSpPr txBox="1"/>
+          <p:nvPr/>
+        </p:nvSpPr>
+        <p:spPr>
+          <a:xfrm>
+            <a:off x="411480" y="201168"/>
+            <a:ext cx="11368735" cy="502920"/>
+          </a:xfrm>
+          <a:prstGeom prst="rect">
+            <a:avLst/>
+          </a:prstGeom>
+          <a:noFill/>
+        </p:spPr>
+        <p:txBody>
+          <a:bodyPr wrap="square">
+            <a:spAutoFit/>
+          </a:bodyPr>
+          <a:lstStyle/>
+          <a:p>
+            <a:pPr>
+              <a:defRPr b="1" sz="2000"/>
+            </a:pPr>
+            <a:r>
+              <a:t>Slide 13 — Decision HERO — Q10 own career rate</a:t>
+            </a:r>
+          </a:p>
+          <a:p>
+            <a:pPr>
+              <a:defRPr sz="1200" i="1"/>
+            </a:pPr>
+            <a:r>
+              <a:t>DECISION · own career pubs rate · N=280 · res=280</a:t>
+            </a:r>
+          </a:p>
+        </p:txBody>
+      </p:sp>
+      <p:pic>
+        <p:nvPicPr>
+          <p:cNvPr id="3" name="Picture 2" descr="HERO_tenure_q10_decision_own_career_infHM_slide.png"/>
+          <p:cNvPicPr>
+            <a:picLocks noChangeAspect="1"/>
+          </p:cNvPicPr>
+          <p:nvPr/>
+        </p:nvPicPr>
+        <p:blipFill>
+          <a:blip r:embed="rId2"/>
+          <a:stretch>
+            <a:fillRect/>
+          </a:stretch>
+        </p:blipFill>
+        <p:spPr>
+          <a:xfrm>
+            <a:off x="3022104" y="777240"/>
+            <a:ext cx="6147486" cy="4114799"/>
+          </a:xfrm>
+          <a:prstGeom prst="rect">
+            <a:avLst/>
+          </a:prstGeom>
+        </p:spPr>
+      </p:pic>
+      <p:sp>
+        <p:nvSpPr>
+          <p:cNvPr id="4" name="TextBox 3"/>
+          <p:cNvSpPr txBox="1"/>
+          <p:nvPr/>
+        </p:nvSpPr>
+        <p:spPr>
+          <a:xfrm>
+            <a:off x="411480" y="4983479"/>
+            <a:ext cx="11368735" cy="1051560"/>
+          </a:xfrm>
+          <a:prstGeom prst="rect">
+            <a:avLst/>
+          </a:prstGeom>
+          <a:noFill/>
+        </p:spPr>
+        <p:txBody>
+          <a:bodyPr wrap="square" anchor="t">
+            <a:spAutoFit/>
+          </a:bodyPr>
+          <a:lstStyle/>
+          <a:p>
+            <a:pPr algn="l">
+              <a:defRPr sz="800">
+                <a:latin typeface="Menlo"/>
+              </a:defRPr>
+            </a:pPr>
+            <a:r>
+              <a:t>python tenure/scripts/tenure_pass_a_decision_hero.py --x-metric own_career --n-bins 10 --output-tag q10_decision_own_career_infHM</a:t>
+            </a:r>
+          </a:p>
+        </p:txBody>
+      </p:sp>
+      <p:sp>
+        <p:nvSpPr>
+          <p:cNvPr id="5" name="TextBox 4"/>
+          <p:cNvSpPr txBox="1"/>
+          <p:nvPr/>
+        </p:nvSpPr>
+        <p:spPr>
+          <a:xfrm>
+            <a:off x="411480" y="6080759"/>
+            <a:ext cx="11368735" cy="320040"/>
+          </a:xfrm>
+          <a:prstGeom prst="rect">
+            <a:avLst/>
+          </a:prstGeom>
+          <a:noFill/>
+        </p:spPr>
+        <p:txBody>
+          <a:bodyPr wrap="none">
+            <a:spAutoFit/>
+          </a:bodyPr>
+          <a:lstStyle/>
+          <a:p>
+            <a:pPr>
+              <a:defRPr sz="1100"/>
+            </a:pPr>
+            <a:r>
+              <a:t>Shape: bin1=46.429% · peak=ventile 8 @ 71.429% · last=67.857% · LPM β₂=-0.0006929</a:t>
             </a:r>
           </a:p>
         </p:txBody>
@@ -3282,7 +4159,7 @@
               <a:defRPr b="1" sz="2000"/>
             </a:pPr>
             <a:r>
-              <a:t>Slide 1 — Tenure HERO v0 — Q16 spell-mean annual LOO</a:t>
+              <a:t>Slide 1 — Tenure HERO v0 — Q16 ASST-PS mean peer LOO</a:t>
             </a:r>
           </a:p>
           <a:p>
@@ -3290,7 +4167,7 @@
               <a:defRPr sz="1200" i="1"/>
             </a:pPr>
             <a:r>
-              <a:t>Baseline lock · mean poolq_LOO over assistant years</a:t>
+              <a:t>ASST-PS · peer LOO (annum) · N=796 · res=376</a:t>
             </a:r>
           </a:p>
         </p:txBody>
@@ -3311,8 +4188,8 @@
         </p:blipFill>
         <p:spPr>
           <a:xfrm>
-            <a:off x="2379745" y="777240"/>
-            <a:ext cx="7432205" cy="4114799"/>
+            <a:off x="3022104" y="777240"/>
+            <a:ext cx="6147486" cy="4114799"/>
           </a:xfrm>
           <a:prstGeom prst="rect">
             <a:avLst/>
@@ -3427,7 +4304,7 @@
               <a:defRPr b="1" sz="2000"/>
             </a:pPr>
             <a:r>
-              <a:t>Slide 2 — Tenure HERO — Q20 spell-mean (dip robustness)</a:t>
+              <a:t>Slide 2 — Tenure HERO — Q20 ASST-PS mean (dip robustness)</a:t>
             </a:r>
           </a:p>
           <a:p>
@@ -3435,7 +4312,7 @@
               <a:defRPr sz="1200" i="1"/>
             </a:pPr>
             <a:r>
-              <a:t>Higher bin count · annual LOO · spell mean</a:t>
+              <a:t>ASST-PS · peer LOO (annum) · N=796 · res=376</a:t>
             </a:r>
           </a:p>
         </p:txBody>
@@ -3456,8 +4333,8 @@
         </p:blipFill>
         <p:spPr>
           <a:xfrm>
-            <a:off x="2401049" y="777240"/>
-            <a:ext cx="7389596" cy="4114800"/>
+            <a:off x="3022104" y="777240"/>
+            <a:ext cx="6147486" cy="4114799"/>
           </a:xfrm>
           <a:prstGeom prst="rect">
             <a:avLst/>
@@ -3472,7 +4349,7 @@
         </p:nvSpPr>
         <p:spPr>
           <a:xfrm>
-            <a:off x="411480" y="4983480"/>
+            <a:off x="411480" y="4983479"/>
             <a:ext cx="11368735" cy="1051560"/>
           </a:xfrm>
           <a:prstGeom prst="rect">
@@ -3505,7 +4382,7 @@
         </p:nvSpPr>
         <p:spPr>
           <a:xfrm>
-            <a:off x="411480" y="6080760"/>
+            <a:off x="411480" y="6080759"/>
             <a:ext cx="11368735" cy="320040"/>
           </a:xfrm>
           <a:prstGeom prst="rect">
@@ -3572,7 +4449,7 @@
               <a:defRPr b="1" sz="2000"/>
             </a:pPr>
             <a:r>
-              <a:t>Slide 3 — Tenure HERO — Q16 last-ps cumulative LOO</a:t>
+              <a:t>Slide 3 — Tenure HERO — Q16 LAST-PS cum peer LOO</a:t>
             </a:r>
           </a:p>
           <a:p>
@@ -3580,7 +4457,7 @@
               <a:defRPr sz="1200" i="1"/>
             </a:pPr>
             <a:r>
-              <a:t>Final assistant year · peer cumulative pubs · MBB last-ps analog</a:t>
+              <a:t>LAST-PS · peer cumulative LOO · N=732 · res=324</a:t>
             </a:r>
           </a:p>
         </p:txBody>
@@ -3601,8 +4478,8 @@
         </p:blipFill>
         <p:spPr>
           <a:xfrm>
-            <a:off x="2355397" y="777240"/>
-            <a:ext cx="7480900" cy="4114800"/>
+            <a:off x="3022104" y="777240"/>
+            <a:ext cx="6147486" cy="4114799"/>
           </a:xfrm>
           <a:prstGeom prst="rect">
             <a:avLst/>
@@ -3617,7 +4494,7 @@
         </p:nvSpPr>
         <p:spPr>
           <a:xfrm>
-            <a:off x="411480" y="4983480"/>
+            <a:off x="411480" y="4983479"/>
             <a:ext cx="11368735" cy="1051560"/>
           </a:xfrm>
           <a:prstGeom prst="rect">
@@ -3637,7 +4514,7 @@
               </a:defRPr>
             </a:pPr>
             <a:r>
-              <a:t>python tenure/scripts/tenure_pass_a_hero.py --grain last_asst --pool-perf cumulative --output-tag q16_lastps_loo_cum_infHM</a:t>
+              <a:t>python tenure/scripts/tenure_pass_a_hero.py --window last_ps --stat cum --output-tag q16_lastps_loo_cum_infHM</a:t>
             </a:r>
           </a:p>
         </p:txBody>
@@ -3650,7 +4527,7 @@
         </p:nvSpPr>
         <p:spPr>
           <a:xfrm>
-            <a:off x="411480" y="6080760"/>
+            <a:off x="411480" y="6080759"/>
             <a:ext cx="11368735" cy="320040"/>
           </a:xfrm>
           <a:prstGeom prst="rect">
@@ -3717,7 +4594,7 @@
               <a:defRPr b="1" sz="2000"/>
             </a:pPr>
             <a:r>
-              <a:t>Slide 4 — Tenure HERO — Q20 last-ps cumulative LOO</a:t>
+              <a:t>Slide 4 — Tenure HERO — Q20 LAST-PS cum peer LOO</a:t>
             </a:r>
           </a:p>
           <a:p>
@@ -3725,7 +4602,7 @@
               <a:defRPr sz="1200" i="1"/>
             </a:pPr>
             <a:r>
-              <a:t>Dip / shoulder robustness · peer cum LOO at exit year</a:t>
+              <a:t>LAST-PS · peer cumulative LOO · N=732 · res=324</a:t>
             </a:r>
           </a:p>
         </p:txBody>
@@ -3746,8 +4623,8 @@
         </p:blipFill>
         <p:spPr>
           <a:xfrm>
-            <a:off x="2355397" y="777240"/>
-            <a:ext cx="7480900" cy="4114800"/>
+            <a:off x="2981945" y="777240"/>
+            <a:ext cx="6227805" cy="4114800"/>
           </a:xfrm>
           <a:prstGeom prst="rect">
             <a:avLst/>
@@ -3782,7 +4659,7 @@
               </a:defRPr>
             </a:pPr>
             <a:r>
-              <a:t>python tenure/scripts/tenure_pass_a_hero.py --grain last_asst --pool-perf cumulative --n-bins 20 --output-tag q20_lastps_loo_cum_infHM</a:t>
+              <a:t>python tenure/scripts/tenure_pass_a_hero.py --window last_ps --stat cum --n-bins 20 --output-tag q20_lastps_loo_cum_infHM</a:t>
             </a:r>
           </a:p>
         </p:txBody>
@@ -3862,7 +4739,7 @@
               <a:defRPr b="1" sz="2000"/>
             </a:pPr>
             <a:r>
-              <a:t>Slide 5 — Tenure HERO — Q16 last-ps own cumulative pubs</a:t>
+              <a:t>Slide 5 — Tenure HERO — Q16 LAST-PS own cum pubs</a:t>
             </a:r>
           </a:p>
           <a:p>
@@ -3870,7 +4747,7 @@
               <a:defRPr sz="1200" i="1"/>
             </a:pPr>
             <a:r>
-              <a:t>Ability slice · own cum pubs at exit (F-HERO porch)</a:t>
+              <a:t>LAST-PS · own cumulative pubs · N=805 · res=383</a:t>
             </a:r>
           </a:p>
         </p:txBody>
@@ -3891,8 +4768,8 @@
         </p:blipFill>
         <p:spPr>
           <a:xfrm>
-            <a:off x="2620181" y="777240"/>
-            <a:ext cx="6951333" cy="4114800"/>
+            <a:off x="3022104" y="777240"/>
+            <a:ext cx="6147486" cy="4114799"/>
           </a:xfrm>
           <a:prstGeom prst="rect">
             <a:avLst/>
@@ -3907,7 +4784,7 @@
         </p:nvSpPr>
         <p:spPr>
           <a:xfrm>
-            <a:off x="411480" y="4983480"/>
+            <a:off x="411480" y="4983479"/>
             <a:ext cx="11368735" cy="1051560"/>
           </a:xfrm>
           <a:prstGeom prst="rect">
@@ -3927,7 +4804,7 @@
               </a:defRPr>
             </a:pPr>
             <a:r>
-              <a:t>python tenure/scripts/tenure_pass_a_hero.py --grain last_asst --x-metric own_cum --output-tag q16_lastps_own_cum_infHM</a:t>
+              <a:t>python tenure/scripts/tenure_pass_a_hero.py --window last_ps --x-metric own_cum --output-tag q16_lastps_own_cum_infHM</a:t>
             </a:r>
           </a:p>
         </p:txBody>
@@ -3940,7 +4817,7 @@
         </p:nvSpPr>
         <p:spPr>
           <a:xfrm>
-            <a:off x="411480" y="6080760"/>
+            <a:off x="411480" y="6080759"/>
             <a:ext cx="11368735" cy="320040"/>
           </a:xfrm>
           <a:prstGeom prst="rect">
@@ -4007,7 +4884,7 @@
               <a:defRPr b="1" sz="2000"/>
             </a:pPr>
             <a:r>
-              <a:t>Slide 6 — Tenure HERO — EW16 last-ps cumulative LOO</a:t>
+              <a:t>Slide 6 — Tenure HERO — EW16 LAST-PS cum peer LOO</a:t>
             </a:r>
           </a:p>
           <a:p>
@@ -4015,7 +4892,7 @@
               <a:defRPr sz="1200" i="1"/>
             </a:pPr>
             <a:r>
-              <a:t>Equal-width bins · hue = bin n · on-bar counts</a:t>
+              <a:t>LAST-PS · peer cumulative LOO · N=732 · res=324</a:t>
             </a:r>
           </a:p>
         </p:txBody>
@@ -4036,8 +4913,8 @@
         </p:blipFill>
         <p:spPr>
           <a:xfrm>
-            <a:off x="2373658" y="777240"/>
-            <a:ext cx="7444379" cy="4114800"/>
+            <a:off x="2981945" y="777240"/>
+            <a:ext cx="6227805" cy="4114800"/>
           </a:xfrm>
           <a:prstGeom prst="rect">
             <a:avLst/>
@@ -4072,7 +4949,7 @@
               </a:defRPr>
             </a:pPr>
             <a:r>
-              <a:t>python tenure/scripts/tenure_pass_a_hero.py --grain last_asst --pool-perf cumulative --bin-method equal_width --output-tag ew16_lastps_loo_cum_infHM</a:t>
+              <a:t>python tenure/scripts/tenure_pass_a_hero.py --window last_ps --stat cum --bin-method equal_width --output-tag ew16_lastps_loo_cum_infHM</a:t>
             </a:r>
           </a:p>
         </p:txBody>
@@ -4152,7 +5029,7 @@
               <a:defRPr b="1" sz="2000"/>
             </a:pPr>
             <a:r>
-              <a:t>Slide 7 — Tenure HERO — EW20 last-ps cumulative LOO</a:t>
+              <a:t>Slide 7 — Tenure HERO — EW20 LAST-PS cum peer LOO</a:t>
             </a:r>
           </a:p>
           <a:p>
@@ -4160,7 +5037,7 @@
               <a:defRPr sz="1200" i="1"/>
             </a:pPr>
             <a:r>
-              <a:t>Equal-width robustness · peer cum LOO at exit year</a:t>
+              <a:t>LAST-PS · peer cumulative LOO · N=732 · res=324</a:t>
             </a:r>
           </a:p>
         </p:txBody>
@@ -4181,8 +5058,8 @@
         </p:blipFill>
         <p:spPr>
           <a:xfrm>
-            <a:off x="2373658" y="777240"/>
-            <a:ext cx="7444379" cy="4114800"/>
+            <a:off x="2981945" y="777240"/>
+            <a:ext cx="6227805" cy="4114800"/>
           </a:xfrm>
           <a:prstGeom prst="rect">
             <a:avLst/>
@@ -4217,7 +5094,7 @@
               </a:defRPr>
             </a:pPr>
             <a:r>
-              <a:t>python tenure/scripts/tenure_pass_a_hero.py --grain last_asst --pool-perf cumulative --bin-method equal_width --n-bins 20 --output-tag ew20_lastps_loo_cum_infHM</a:t>
+              <a:t>python tenure/scripts/tenure_pass_a_hero.py --window last_ps --stat cum --bin-method equal_width --n-bins 20 --output-tag ew20_lastps_loo_cum_infHM</a:t>
             </a:r>
           </a:p>
         </p:txBody>
@@ -4249,6 +5126,110 @@
             </a:pPr>
             <a:r>
               <a:t>Shape: bin1=29.032% · peak=ventile 6 @ 100.0% · last=100.0% · LPM β₂=-3.072e-05</a:t>
+            </a:r>
+          </a:p>
+        </p:txBody>
+      </p:sp>
+    </p:spTree>
+  </p:cSld>
+  <p:clrMapOvr>
+    <a:masterClrMapping/>
+  </p:clrMapOvr>
+</p:sld>
+</file>
+
+<file path=ppt/slides/slide9.xml><?xml version="1.0" encoding="utf-8"?>
+<p:sld xmlns:a="http://schemas.openxmlformats.org/drawingml/2006/main" xmlns:p="http://schemas.openxmlformats.org/presentationml/2006/main" xmlns:r="http://schemas.openxmlformats.org/officeDocument/2006/relationships">
+  <p:cSld>
+    <p:spTree>
+      <p:nvGrpSpPr>
+        <p:cNvPr id="1" name=""/>
+        <p:cNvGrpSpPr/>
+        <p:nvPr/>
+      </p:nvGrpSpPr>
+      <p:grpSpPr/>
+      <p:sp>
+        <p:nvSpPr>
+          <p:cNvPr id="2" name="TextBox 1"/>
+          <p:cNvSpPr txBox="1"/>
+          <p:nvPr/>
+        </p:nvSpPr>
+        <p:spPr>
+          <a:xfrm>
+            <a:off x="411480" y="201168"/>
+            <a:ext cx="11368735" cy="502920"/>
+          </a:xfrm>
+          <a:prstGeom prst="rect">
+            <a:avLst/>
+          </a:prstGeom>
+          <a:noFill/>
+        </p:spPr>
+        <p:txBody>
+          <a:bodyPr wrap="square">
+            <a:spAutoFit/>
+          </a:bodyPr>
+          <a:lstStyle/>
+          <a:p>
+            <a:pPr>
+              <a:defRPr b="1" sz="2000"/>
+            </a:pPr>
+            <a:r>
+              <a:t>Decision cohort HERO — dept pond (PD29)</a:t>
+            </a:r>
+          </a:p>
+          <a:p>
+            <a:pPr>
+              <a:defRPr sz="1200" i="1"/>
+            </a:pPr>
+            <a:r>
+              <a:t>Resolved exits · whole department at decision year</a:t>
+            </a:r>
+          </a:p>
+        </p:txBody>
+      </p:sp>
+      <p:sp>
+        <p:nvSpPr>
+          <p:cNvPr id="3" name="TextBox 2"/>
+          <p:cNvSpPr txBox="1"/>
+          <p:nvPr/>
+        </p:nvSpPr>
+        <p:spPr>
+          <a:xfrm>
+            <a:off x="411480" y="960120"/>
+            <a:ext cx="11368735" cy="1005840"/>
+          </a:xfrm>
+          <a:prstGeom prst="rect">
+            <a:avLst/>
+          </a:prstGeom>
+          <a:noFill/>
+        </p:spPr>
+        <p:txBody>
+          <a:bodyPr wrap="square">
+            <a:spAutoFit/>
+          </a:bodyPr>
+          <a:lstStyle/>
+          <a:p>
+            <a:pPr>
+              <a:defRPr sz="1200"/>
+            </a:pPr>
+            <a:r>
+              <a:t>• Peer X = LOO mean pubs_per_career_year among dept faculty at decision year.</a:t>
+            </a:r>
+          </a:p>
+          <a:p>
+            <a:pPr>
+              <a:defRPr sz="1200"/>
+            </a:pPr>
+            <a:r>
+              <a:t>• Cohort = all resolved infHM (391); excludes transferred.</a:t>
+            </a:r>
+          </a:p>
+          <a:p>
+            <a:pPr>
+              <a:defRPr sz="1200"/>
+            </a:pPr>
+            <a:r>
+              <a:t>• Own-career slide = ability slice (not peer context).</a:t>
             </a:r>
           </a:p>
         </p:txBody>
